--- a/classes/parte-8-blue-team-deteccion-y-soc/198-casos-de-estudio-de-deteccion/clase-198-presentacion.pptx
+++ b/classes/parte-8-blue-team-deteccion-y-soc/198-casos-de-estudio-de-deteccion/clase-198-presentacion.pptx
@@ -17,6 +17,11 @@
     <p:sldId id="265" r:id="rId16"/>
     <p:sldId id="266" r:id="rId17"/>
     <p:sldId id="267" r:id="rId18"/>
+    <p:sldId id="268" r:id="rId19"/>
+    <p:sldId id="269" r:id="rId20"/>
+    <p:sldId id="270" r:id="rId21"/>
+    <p:sldId id="271" r:id="rId22"/>
+    <p:sldId id="272" r:id="rId23"/>
   </p:sldIdLst>
   <p:sldSz cx="9144000" cy="6858000" type="screen4x3"/>
   <p:notesSz cx="6858000" cy="9144000"/>
@@ -3198,7 +3203,7 @@
                   <a:srgbClr val="0B3D2E"/>
                 </a:solidFill>
               </a:rPr>
-              <a:t>⚠️ Errores comunes</a:t>
+              <a:t>🧰 Herramientas y preparación</a:t>
             </a:r>
           </a:p>
         </p:txBody>
@@ -3236,67 +3241,67 @@
                   <a:srgbClr val="22282E"/>
                 </a:solidFill>
               </a:rPr>
-              <a:t>•  Timeline desordenada — Tiempos no sincronizados; normaliza a UTC (clase 182)</a:t>
-            </a:r>
-          </a:p>
-          <a:p>
-            <a:pPr>
-              <a:spcAft>
-                <a:spcPts val="600"/>
-              </a:spcAft>
-            </a:pPr>
-            <a:r>
-              <a:rPr sz="1500">
-                <a:solidFill>
-                  <a:srgbClr val="22282E"/>
-                </a:solidFill>
-              </a:rPr>
-              <a:t>•  Fases sin evidencia — Punto ciego de telemetría; anótalo como hueco a cerrar</a:t>
-            </a:r>
-          </a:p>
-          <a:p>
-            <a:pPr>
-              <a:spcAft>
-                <a:spcPts val="600"/>
-              </a:spcAft>
-            </a:pPr>
-            <a:r>
-              <a:rPr sz="1500">
-                <a:solidFill>
-                  <a:srgbClr val="22282E"/>
-                </a:solidFill>
-              </a:rPr>
-              <a:t>•  Mapeo ATT&amp;CK forzado — Técnica mal asignada; verifica el procedimiento real</a:t>
-            </a:r>
-          </a:p>
-          <a:p>
-            <a:pPr>
-              <a:spcAft>
-                <a:spcPts val="600"/>
-              </a:spcAft>
-            </a:pPr>
-            <a:r>
-              <a:rPr sz="1500">
-                <a:solidFill>
-                  <a:srgbClr val="22282E"/>
-                </a:solidFill>
-              </a:rPr>
-              <a:t>•  "El ataque era indetectable" — Casi nunca; suele faltar una fuente o una regla, no ser imposible</a:t>
-            </a:r>
-          </a:p>
-          <a:p>
-            <a:pPr>
-              <a:spcAft>
-                <a:spcPts val="600"/>
-              </a:spcAft>
-            </a:pPr>
-            <a:r>
-              <a:rPr sz="1500">
-                <a:solidFill>
-                  <a:srgbClr val="22282E"/>
-                </a:solidFill>
-              </a:rPr>
-              <a:t>•  Reporte sin acciones — Análisis sin lecciones; cada caso debe producir mejoras concretas</a:t>
+              <a:t>•  Un dataset de intrusión realista: Splunk BOTS, Security Onion con PCAP/logs de ejemplo, o EVTX-ATTACK-SAMPLES (colección de Event Logs de ataques).</a:t>
+            </a:r>
+          </a:p>
+          <a:p>
+            <a:pPr>
+              <a:spcAft>
+                <a:spcPts val="600"/>
+              </a:spcAft>
+            </a:pPr>
+            <a:r>
+              <a:rPr sz="1500">
+                <a:solidFill>
+                  <a:srgbClr val="22282E"/>
+                </a:solidFill>
+              </a:rPr>
+              <a:t>•  Tu SIEM (Splunk/Elastic) para consultar la telemetría del caso.</a:t>
+            </a:r>
+          </a:p>
+          <a:p>
+            <a:pPr>
+              <a:spcAft>
+                <a:spcPts val="600"/>
+              </a:spcAft>
+            </a:pPr>
+            <a:r>
+              <a:rPr sz="1500">
+                <a:solidFill>
+                  <a:srgbClr val="22282E"/>
+                </a:solidFill>
+              </a:rPr>
+              <a:t>•  ATT&amp;CK Navigator para el mapeo.</a:t>
+            </a:r>
+          </a:p>
+          <a:p>
+            <a:pPr>
+              <a:spcAft>
+                <a:spcPts val="600"/>
+              </a:spcAft>
+            </a:pPr>
+            <a:r>
+              <a:rPr sz="1500">
+                <a:solidFill>
+                  <a:srgbClr val="22282E"/>
+                </a:solidFill>
+              </a:rPr>
+              <a:t>•  Una plantilla de reporte de incidente con línea de tiempo.</a:t>
+            </a:r>
+          </a:p>
+          <a:p>
+            <a:pPr>
+              <a:spcAft>
+                <a:spcPts val="600"/>
+              </a:spcAft>
+            </a:pPr>
+            <a:r>
+              <a:rPr sz="1500">
+                <a:solidFill>
+                  <a:srgbClr val="22282E"/>
+                </a:solidFill>
+              </a:rPr>
+              <a:t>•  Trabaja sobre datasets públicos o de tu laboratorio; no analices datos de terceros sin autorización.</a:t>
             </a:r>
           </a:p>
         </p:txBody>
@@ -3347,7 +3352,7 @@
                   <a:srgbClr val="0B3D2E"/>
                 </a:solidFill>
               </a:rPr>
-              <a:t>❓ Preguntas frecuentes</a:t>
+              <a:t>🧪 Laboratorio guiado — Resuelve una intrusión completa</a:t>
             </a:r>
           </a:p>
         </p:txBody>
@@ -3385,82 +3390,97 @@
                   <a:srgbClr val="22282E"/>
                 </a:solidFill>
               </a:rPr>
-              <a:t>•  ❓ ¿Por qué estudiar casos si ya sé las técnicas?</a:t>
-            </a:r>
-          </a:p>
-          <a:p>
-            <a:pPr>
-              <a:spcAft>
-                <a:spcPts val="600"/>
-              </a:spcAft>
-            </a:pPr>
-            <a:r>
-              <a:rPr sz="1500">
-                <a:solidFill>
-                  <a:srgbClr val="22282E"/>
-                </a:solidFill>
-              </a:rPr>
-              <a:t>•  Porque la realidad mezcla fases, ruido y datos incompletos. Los casos entrenan el pivoteo, la reconstrucción y el criterio, que ninguna clase teórica da por sí sola.</a:t>
-            </a:r>
-          </a:p>
-          <a:p>
-            <a:pPr>
-              <a:spcAft>
-                <a:spcPts val="600"/>
-              </a:spcAft>
-            </a:pPr>
-            <a:r>
-              <a:rPr sz="1500">
-                <a:solidFill>
-                  <a:srgbClr val="22282E"/>
-                </a:solidFill>
-              </a:rPr>
-              <a:t>•  ❓ ¿Dónde consigo datos realistas para practicar?</a:t>
-            </a:r>
-          </a:p>
-          <a:p>
-            <a:pPr>
-              <a:spcAft>
-                <a:spcPts val="600"/>
-              </a:spcAft>
-            </a:pPr>
-            <a:r>
-              <a:rPr sz="1500">
-                <a:solidFill>
-                  <a:srgbClr val="22282E"/>
-                </a:solidFill>
-              </a:rPr>
-              <a:t>•  Splunk BOTS, Security Onion, EVTX-ATTACK-SAMPLES y los datasets de Atomic Red Team ofrecen telemetría de ataques reproducible y legal para entrenar.</a:t>
-            </a:r>
-          </a:p>
-          <a:p>
-            <a:pPr>
-              <a:spcAft>
-                <a:spcPts val="600"/>
-              </a:spcAft>
-            </a:pPr>
-            <a:r>
-              <a:rPr sz="1500">
-                <a:solidFill>
-                  <a:srgbClr val="22282E"/>
-                </a:solidFill>
-              </a:rPr>
-              <a:t>•  ❓ ¿El objetivo es encontrar al atacante o mejorar la detección?</a:t>
-            </a:r>
-          </a:p>
-          <a:p>
-            <a:pPr>
-              <a:spcAft>
-                <a:spcPts val="600"/>
-              </a:spcAft>
-            </a:pPr>
-            <a:r>
-              <a:rPr sz="1500">
-                <a:solidFill>
-                  <a:srgbClr val="22282E"/>
-                </a:solidFill>
-              </a:rPr>
-              <a:t>•  Ambos, pero el valor duradero está en las detecciones y lecciones que dejas: cada caso resuelto debe hacer al SOC más difícil de sorprender la próxima vez.</a:t>
+              <a:t>•  Carga el dataset. Importa BOTS o los EVTX de ataque en tu SIEM.</a:t>
+            </a:r>
+          </a:p>
+          <a:p>
+            <a:pPr>
+              <a:spcAft>
+                <a:spcPts val="600"/>
+              </a:spcAft>
+            </a:pPr>
+            <a:r>
+              <a:rPr sz="1500">
+                <a:solidFill>
+                  <a:srgbClr val="22282E"/>
+                </a:solidFill>
+              </a:rPr>
+              <a:t>•  Establece el punto de partida. Localiza el acceso inicial (correo de phishing, adjunto, primer proceso anómalo) y fija el T0.</a:t>
+            </a:r>
+          </a:p>
+          <a:p>
+            <a:pPr>
+              <a:spcAft>
+                <a:spcPts val="600"/>
+              </a:spcAft>
+            </a:pPr>
+            <a:r>
+              <a:rPr sz="1500">
+                <a:solidFill>
+                  <a:srgbClr val="22282E"/>
+                </a:solidFill>
+              </a:rPr>
+              <a:t>•  Sigue la ejecución. Pivota del adjunto al proceso (Sysmon 1), a la línea de comandos y a la descarga (Event 3/proxy).</a:t>
+            </a:r>
+          </a:p>
+          <a:p>
+            <a:pPr>
+              <a:spcAft>
+                <a:spcPts val="600"/>
+              </a:spcAft>
+            </a:pPr>
+            <a:r>
+              <a:rPr sz="1500">
+                <a:solidFill>
+                  <a:srgbClr val="22282E"/>
+                </a:solidFill>
+              </a:rPr>
+              <a:t>•  Detecta persistencia. Busca tareas programadas, Run keys o servicios creados (4698, Sysmon 13, 7045).</a:t>
+            </a:r>
+          </a:p>
+          <a:p>
+            <a:pPr>
+              <a:spcAft>
+                <a:spcPts val="600"/>
+              </a:spcAft>
+            </a:pPr>
+            <a:r>
+              <a:rPr sz="1500">
+                <a:solidFill>
+                  <a:srgbClr val="22282E"/>
+                </a:solidFill>
+              </a:rPr>
+              <a:t>•  Rastrea el movimiento lateral. Correlaciona logons entre hosts (clase 192): PsExec/WMI/WinRM, 4624 tipo 3/10.</a:t>
+            </a:r>
+          </a:p>
+          <a:p>
+            <a:pPr>
+              <a:spcAft>
+                <a:spcPts val="600"/>
+              </a:spcAft>
+            </a:pPr>
+            <a:r>
+              <a:rPr sz="1500">
+                <a:solidFill>
+                  <a:srgbClr val="22282E"/>
+                </a:solidFill>
+              </a:rPr>
+              <a:t>•  Encuentra el C2 y la exfiltración. Identifica beaconing (clase 193) y salida de datos anómala (clase 191).</a:t>
+            </a:r>
+          </a:p>
+          <a:p>
+            <a:pPr>
+              <a:spcAft>
+                <a:spcPts val="600"/>
+              </a:spcAft>
+            </a:pPr>
+            <a:r>
+              <a:rPr sz="1500">
+                <a:solidFill>
+                  <a:srgbClr val="22282E"/>
+                </a:solidFill>
+              </a:rPr>
+              <a:t>•  Construye la timeline. Ordena todos los eventos con su técnica ATT&amp;CK asociada en una tabla.</a:t>
             </a:r>
           </a:p>
         </p:txBody>
@@ -3511,7 +3531,7 @@
                   <a:srgbClr val="0B3D2E"/>
                 </a:solidFill>
               </a:rPr>
-              <a:t>🔗 Referencias</a:t>
+              <a:t>✍️ Ejercicios</a:t>
             </a:r>
           </a:p>
         </p:txBody>
@@ -3549,71 +3569,712 @@
                   <a:srgbClr val="22282E"/>
                 </a:solidFill>
               </a:rPr>
-              <a:t>•  Bejtlich, R. The Practice of Network Security Monitoring. No Starch Press.</a:t>
-            </a:r>
-          </a:p>
-          <a:p>
-            <a:pPr>
-              <a:spcAft>
-                <a:spcPts val="600"/>
-              </a:spcAft>
-            </a:pPr>
-            <a:r>
-              <a:rPr sz="1500">
-                <a:solidFill>
-                  <a:srgbClr val="22282E"/>
-                </a:solidFill>
-              </a:rPr>
-              <a:t>•  Sanders, C. y Smith, J. Applied Network Security Monitoring. Syngress.</a:t>
-            </a:r>
-          </a:p>
-          <a:p>
-            <a:pPr>
-              <a:spcAft>
-                <a:spcPts val="600"/>
-              </a:spcAft>
-            </a:pPr>
-            <a:r>
-              <a:rPr sz="1500">
-                <a:solidFill>
-                  <a:srgbClr val="22282E"/>
-                </a:solidFill>
-              </a:rPr>
-              <a:t>•  Splunk BOTS datasets — &lt;https://github.com/splunk/botsv3&gt;</a:t>
-            </a:r>
-          </a:p>
-          <a:p>
-            <a:pPr>
-              <a:spcAft>
-                <a:spcPts val="600"/>
-              </a:spcAft>
-            </a:pPr>
-            <a:r>
-              <a:rPr sz="1500">
-                <a:solidFill>
-                  <a:srgbClr val="22282E"/>
-                </a:solidFill>
-              </a:rPr>
-              <a:t>•  EVTX-ATTACK-SAMPLES — &lt;https://github.com/sbousseaden/EVTX-ATTACK-SAMPLES&gt;</a:t>
-            </a:r>
-          </a:p>
-          <a:p>
-            <a:pPr>
-              <a:spcAft>
-                <a:spcPts val="600"/>
-              </a:spcAft>
-            </a:pPr>
-            <a:r>
-              <a:rPr sz="1500">
-                <a:solidFill>
-                  <a:srgbClr val="22282E"/>
-                </a:solidFill>
-              </a:rPr>
-              <a:t>•  MITRE ATT&amp;CK — &lt;https://attack.mitre.org/&gt;</a:t>
-            </a:r>
-          </a:p>
-        </p:txBody>
-      </p:sp>
+              <a:t>•  Reconstruye la fase de acceso inicial de un caso con sus eventos.</a:t>
+            </a:r>
+          </a:p>
+          <a:p>
+            <a:pPr>
+              <a:spcAft>
+                <a:spcPts val="600"/>
+              </a:spcAft>
+            </a:pPr>
+            <a:r>
+              <a:rPr sz="1500">
+                <a:solidFill>
+                  <a:srgbClr val="22282E"/>
+                </a:solidFill>
+              </a:rPr>
+              <a:t>•  Mapea las 6 fases de un caso a técnicas ATT&amp;CK concretas.</a:t>
+            </a:r>
+          </a:p>
+          <a:p>
+            <a:pPr>
+              <a:spcAft>
+                <a:spcPts val="600"/>
+              </a:spcAft>
+            </a:pPr>
+            <a:r>
+              <a:rPr sz="1500">
+                <a:solidFill>
+                  <a:srgbClr val="22282E"/>
+                </a:solidFill>
+              </a:rPr>
+              <a:t>•  Identifica el punto de detección más temprano posible y su regla.</a:t>
+            </a:r>
+          </a:p>
+          <a:p>
+            <a:pPr>
+              <a:spcAft>
+                <a:spcPts val="600"/>
+              </a:spcAft>
+            </a:pPr>
+            <a:r>
+              <a:rPr sz="1500">
+                <a:solidFill>
+                  <a:srgbClr val="22282E"/>
+                </a:solidFill>
+              </a:rPr>
+              <a:t>•  Redacta 5 lecciones aprendidas accionables.</a:t>
+            </a:r>
+          </a:p>
+          <a:p>
+            <a:pPr>
+              <a:spcAft>
+                <a:spcPts val="600"/>
+              </a:spcAft>
+            </a:pPr>
+            <a:r>
+              <a:rPr sz="1500">
+                <a:solidFill>
+                  <a:srgbClr val="22282E"/>
+                </a:solidFill>
+              </a:rPr>
+              <a:t>•  Escribe una detección nueva derivada de un hueco del caso.</a:t>
+            </a:r>
+          </a:p>
+          <a:p>
+            <a:pPr>
+              <a:spcAft>
+                <a:spcPts val="600"/>
+              </a:spcAft>
+            </a:pPr>
+            <a:r>
+              <a:rPr sz="1500">
+                <a:solidFill>
+                  <a:srgbClr val="22282E"/>
+                </a:solidFill>
+              </a:rPr>
+              <a:t>•  Elabora la línea de tiempo del caso en una sola tabla.</a:t>
+            </a:r>
+          </a:p>
+        </p:txBody>
+      </p:sp>
+    </p:spTree>
+  </p:cSld>
+  <p:clrMapOvr>
+    <a:masterClrMapping/>
+  </p:clrMapOvr>
+</p:sld>
+</file>
+
+<file path=ppt/slides/slide13.xml><?xml version="1.0" encoding="utf-8"?>
+<p:sld xmlns:a="http://schemas.openxmlformats.org/drawingml/2006/main" xmlns:p="http://schemas.openxmlformats.org/presentationml/2006/main" xmlns:r="http://schemas.openxmlformats.org/officeDocument/2006/relationships">
+  <p:cSld>
+    <p:spTree>
+      <p:nvGrpSpPr>
+        <p:cNvPr id="1" name=""/>
+        <p:cNvGrpSpPr/>
+        <p:nvPr/>
+      </p:nvGrpSpPr>
+      <p:grpSpPr/>
+      <p:sp>
+        <p:nvSpPr>
+          <p:cNvPr id="2" name="TextBox 1"/>
+          <p:cNvSpPr txBox="1"/>
+          <p:nvPr/>
+        </p:nvSpPr>
+        <p:spPr>
+          <a:xfrm>
+            <a:off x="457200" y="320040"/>
+            <a:ext cx="8229600" cy="822960"/>
+          </a:xfrm>
+          <a:prstGeom prst="rect">
+            <a:avLst/>
+          </a:prstGeom>
+          <a:noFill/>
+        </p:spPr>
+        <p:txBody>
+          <a:bodyPr wrap="square">
+            <a:spAutoFit/>
+          </a:bodyPr>
+          <a:lstStyle/>
+          <a:p>
+            <a:r>
+              <a:rPr sz="2600" b="1">
+                <a:solidFill>
+                  <a:srgbClr val="0B3D2E"/>
+                </a:solidFill>
+              </a:rPr>
+              <a:t>📝 Reto verificable</a:t>
+            </a:r>
+          </a:p>
+        </p:txBody>
+      </p:sp>
+      <p:sp>
+        <p:nvSpPr>
+          <p:cNvPr id="3" name="TextBox 2"/>
+          <p:cNvSpPr txBox="1"/>
+          <p:nvPr/>
+        </p:nvSpPr>
+        <p:spPr>
+          <a:xfrm>
+            <a:off x="457200" y="1280160"/>
+            <a:ext cx="8229600" cy="4937760"/>
+          </a:xfrm>
+          <a:prstGeom prst="rect">
+            <a:avLst/>
+          </a:prstGeom>
+          <a:noFill/>
+        </p:spPr>
+        <p:txBody>
+          <a:bodyPr wrap="square">
+            <a:spAutoFit/>
+          </a:bodyPr>
+          <a:lstStyle/>
+          <a:p>
+            <a:pPr>
+              <a:spcAft>
+                <a:spcPts val="600"/>
+              </a:spcAft>
+            </a:pPr>
+            <a:r>
+              <a:rPr sz="1500">
+                <a:solidFill>
+                  <a:srgbClr val="22282E"/>
+                </a:solidFill>
+              </a:rPr>
+              <a:t>•  Resuelve un caso completo entregando: línea de tiempo con técnicas ATT&amp;CK por fase, identificación de los puntos de detección perdidos y al menos tres detecciones nuevas que habrían interrumpido la…</a:t>
+            </a:r>
+          </a:p>
+        </p:txBody>
+      </p:sp>
+    </p:spTree>
+  </p:cSld>
+  <p:clrMapOvr>
+    <a:masterClrMapping/>
+  </p:clrMapOvr>
+</p:sld>
+</file>
+
+<file path=ppt/slides/slide14.xml><?xml version="1.0" encoding="utf-8"?>
+<p:sld xmlns:a="http://schemas.openxmlformats.org/drawingml/2006/main" xmlns:p="http://schemas.openxmlformats.org/presentationml/2006/main" xmlns:r="http://schemas.openxmlformats.org/officeDocument/2006/relationships">
+  <p:cSld>
+    <p:spTree>
+      <p:nvGrpSpPr>
+        <p:cNvPr id="1" name=""/>
+        <p:cNvGrpSpPr/>
+        <p:nvPr/>
+      </p:nvGrpSpPr>
+      <p:grpSpPr/>
+      <p:sp>
+        <p:nvSpPr>
+          <p:cNvPr id="2" name="TextBox 1"/>
+          <p:cNvSpPr txBox="1"/>
+          <p:nvPr/>
+        </p:nvSpPr>
+        <p:spPr>
+          <a:xfrm>
+            <a:off x="457200" y="320040"/>
+            <a:ext cx="8229600" cy="822960"/>
+          </a:xfrm>
+          <a:prstGeom prst="rect">
+            <a:avLst/>
+          </a:prstGeom>
+          <a:noFill/>
+        </p:spPr>
+        <p:txBody>
+          <a:bodyPr wrap="square">
+            <a:spAutoFit/>
+          </a:bodyPr>
+          <a:lstStyle/>
+          <a:p>
+            <a:r>
+              <a:rPr sz="2600" b="1">
+                <a:solidFill>
+                  <a:srgbClr val="0B3D2E"/>
+                </a:solidFill>
+              </a:rPr>
+              <a:t>⚠️ Errores comunes</a:t>
+            </a:r>
+          </a:p>
+        </p:txBody>
+      </p:sp>
+      <p:sp>
+        <p:nvSpPr>
+          <p:cNvPr id="3" name="TextBox 2"/>
+          <p:cNvSpPr txBox="1"/>
+          <p:nvPr/>
+        </p:nvSpPr>
+        <p:spPr>
+          <a:xfrm>
+            <a:off x="457200" y="1280160"/>
+            <a:ext cx="8229600" cy="4937760"/>
+          </a:xfrm>
+          <a:prstGeom prst="rect">
+            <a:avLst/>
+          </a:prstGeom>
+          <a:noFill/>
+        </p:spPr>
+        <p:txBody>
+          <a:bodyPr wrap="square">
+            <a:spAutoFit/>
+          </a:bodyPr>
+          <a:lstStyle/>
+          <a:p>
+            <a:pPr>
+              <a:spcAft>
+                <a:spcPts val="600"/>
+              </a:spcAft>
+            </a:pPr>
+            <a:r>
+              <a:rPr sz="1500">
+                <a:solidFill>
+                  <a:srgbClr val="22282E"/>
+                </a:solidFill>
+              </a:rPr>
+              <a:t>•  Timeline desordenada — Tiempos no sincronizados; normaliza a UTC (clase 182)</a:t>
+            </a:r>
+          </a:p>
+          <a:p>
+            <a:pPr>
+              <a:spcAft>
+                <a:spcPts val="600"/>
+              </a:spcAft>
+            </a:pPr>
+            <a:r>
+              <a:rPr sz="1500">
+                <a:solidFill>
+                  <a:srgbClr val="22282E"/>
+                </a:solidFill>
+              </a:rPr>
+              <a:t>•  Fases sin evidencia — Punto ciego de telemetría; anótalo como hueco a cerrar</a:t>
+            </a:r>
+          </a:p>
+          <a:p>
+            <a:pPr>
+              <a:spcAft>
+                <a:spcPts val="600"/>
+              </a:spcAft>
+            </a:pPr>
+            <a:r>
+              <a:rPr sz="1500">
+                <a:solidFill>
+                  <a:srgbClr val="22282E"/>
+                </a:solidFill>
+              </a:rPr>
+              <a:t>•  Mapeo ATT&amp;CK forzado — Técnica mal asignada; verifica el procedimiento real</a:t>
+            </a:r>
+          </a:p>
+          <a:p>
+            <a:pPr>
+              <a:spcAft>
+                <a:spcPts val="600"/>
+              </a:spcAft>
+            </a:pPr>
+            <a:r>
+              <a:rPr sz="1500">
+                <a:solidFill>
+                  <a:srgbClr val="22282E"/>
+                </a:solidFill>
+              </a:rPr>
+              <a:t>•  "El ataque era indetectable" — Afirmación no demostrada; separa ausencia de telemetría, fallo de ingesta, falta de analítica y comportamiento realmente no observable con las fuentes disponibles</a:t>
+            </a:r>
+          </a:p>
+          <a:p>
+            <a:pPr>
+              <a:spcAft>
+                <a:spcPts val="600"/>
+              </a:spcAft>
+            </a:pPr>
+            <a:r>
+              <a:rPr sz="1500">
+                <a:solidFill>
+                  <a:srgbClr val="22282E"/>
+                </a:solidFill>
+              </a:rPr>
+              <a:t>•  Reporte sin acciones — Análisis sin lecciones; cada caso debe producir mejoras concretas</a:t>
+            </a:r>
+          </a:p>
+        </p:txBody>
+      </p:sp>
+    </p:spTree>
+  </p:cSld>
+  <p:clrMapOvr>
+    <a:masterClrMapping/>
+  </p:clrMapOvr>
+</p:sld>
+</file>
+
+<file path=ppt/slides/slide15.xml><?xml version="1.0" encoding="utf-8"?>
+<p:sld xmlns:a="http://schemas.openxmlformats.org/drawingml/2006/main" xmlns:p="http://schemas.openxmlformats.org/presentationml/2006/main" xmlns:r="http://schemas.openxmlformats.org/officeDocument/2006/relationships">
+  <p:cSld>
+    <p:spTree>
+      <p:nvGrpSpPr>
+        <p:cNvPr id="1" name=""/>
+        <p:cNvGrpSpPr/>
+        <p:nvPr/>
+      </p:nvGrpSpPr>
+      <p:grpSpPr/>
+      <p:sp>
+        <p:nvSpPr>
+          <p:cNvPr id="2" name="TextBox 1"/>
+          <p:cNvSpPr txBox="1"/>
+          <p:nvPr/>
+        </p:nvSpPr>
+        <p:spPr>
+          <a:xfrm>
+            <a:off x="457200" y="320040"/>
+            <a:ext cx="8229600" cy="822960"/>
+          </a:xfrm>
+          <a:prstGeom prst="rect">
+            <a:avLst/>
+          </a:prstGeom>
+          <a:noFill/>
+        </p:spPr>
+        <p:txBody>
+          <a:bodyPr wrap="square">
+            <a:spAutoFit/>
+          </a:bodyPr>
+          <a:lstStyle/>
+          <a:p>
+            <a:r>
+              <a:rPr sz="2600" b="1">
+                <a:solidFill>
+                  <a:srgbClr val="0B3D2E"/>
+                </a:solidFill>
+              </a:rPr>
+              <a:t>❓ Preguntas frecuentes</a:t>
+            </a:r>
+          </a:p>
+        </p:txBody>
+      </p:sp>
+      <p:sp>
+        <p:nvSpPr>
+          <p:cNvPr id="3" name="TextBox 2"/>
+          <p:cNvSpPr txBox="1"/>
+          <p:nvPr/>
+        </p:nvSpPr>
+        <p:spPr>
+          <a:xfrm>
+            <a:off x="457200" y="1280160"/>
+            <a:ext cx="8229600" cy="4937760"/>
+          </a:xfrm>
+          <a:prstGeom prst="rect">
+            <a:avLst/>
+          </a:prstGeom>
+          <a:noFill/>
+        </p:spPr>
+        <p:txBody>
+          <a:bodyPr wrap="square">
+            <a:spAutoFit/>
+          </a:bodyPr>
+          <a:lstStyle/>
+          <a:p>
+            <a:pPr>
+              <a:spcAft>
+                <a:spcPts val="600"/>
+              </a:spcAft>
+            </a:pPr>
+            <a:r>
+              <a:rPr sz="1500">
+                <a:solidFill>
+                  <a:srgbClr val="22282E"/>
+                </a:solidFill>
+              </a:rPr>
+              <a:t>•  ❓ ¿Por qué estudiar casos si ya sé las técnicas?</a:t>
+            </a:r>
+          </a:p>
+          <a:p>
+            <a:pPr>
+              <a:spcAft>
+                <a:spcPts val="600"/>
+              </a:spcAft>
+            </a:pPr>
+            <a:r>
+              <a:rPr sz="1500">
+                <a:solidFill>
+                  <a:srgbClr val="22282E"/>
+                </a:solidFill>
+              </a:rPr>
+              <a:t>•  Porque la realidad mezcla fases, ruido y datos incompletos. Los casos entrenan el pivoteo, la reconstrucción y el criterio, que ninguna clase teórica da por sí sola.</a:t>
+            </a:r>
+          </a:p>
+          <a:p>
+            <a:pPr>
+              <a:spcAft>
+                <a:spcPts val="600"/>
+              </a:spcAft>
+            </a:pPr>
+            <a:r>
+              <a:rPr sz="1500">
+                <a:solidFill>
+                  <a:srgbClr val="22282E"/>
+                </a:solidFill>
+              </a:rPr>
+              <a:t>•  ❓ ¿Dónde consigo datos realistas para practicar?</a:t>
+            </a:r>
+          </a:p>
+          <a:p>
+            <a:pPr>
+              <a:spcAft>
+                <a:spcPts val="600"/>
+              </a:spcAft>
+            </a:pPr>
+            <a:r>
+              <a:rPr sz="1500">
+                <a:solidFill>
+                  <a:srgbClr val="22282E"/>
+                </a:solidFill>
+              </a:rPr>
+              <a:t>•  Splunk BOTS, Security Onion, EVTX-ATTACK-SAMPLES y los datasets de Atomic Red Team ofrecen telemetría de ataques reproducible y legal para entrenar.</a:t>
+            </a:r>
+          </a:p>
+          <a:p>
+            <a:pPr>
+              <a:spcAft>
+                <a:spcPts val="600"/>
+              </a:spcAft>
+            </a:pPr>
+            <a:r>
+              <a:rPr sz="1500">
+                <a:solidFill>
+                  <a:srgbClr val="22282E"/>
+                </a:solidFill>
+              </a:rPr>
+              <a:t>•  ❓ ¿El objetivo es encontrar al atacante o mejorar la detección?</a:t>
+            </a:r>
+          </a:p>
+          <a:p>
+            <a:pPr>
+              <a:spcAft>
+                <a:spcPts val="600"/>
+              </a:spcAft>
+            </a:pPr>
+            <a:r>
+              <a:rPr sz="1500">
+                <a:solidFill>
+                  <a:srgbClr val="22282E"/>
+                </a:solidFill>
+              </a:rPr>
+              <a:t>•  Ambos, pero el valor duradero está en las detecciones y lecciones que dejas: cada caso resuelto debe hacer al SOC más difícil de sorprender la próxima vez.</a:t>
+            </a:r>
+          </a:p>
+        </p:txBody>
+      </p:sp>
+    </p:spTree>
+  </p:cSld>
+  <p:clrMapOvr>
+    <a:masterClrMapping/>
+  </p:clrMapOvr>
+</p:sld>
+</file>
+
+<file path=ppt/slides/slide16.xml><?xml version="1.0" encoding="utf-8"?>
+<p:sld xmlns:a="http://schemas.openxmlformats.org/drawingml/2006/main" xmlns:p="http://schemas.openxmlformats.org/presentationml/2006/main" xmlns:r="http://schemas.openxmlformats.org/officeDocument/2006/relationships">
+  <p:cSld>
+    <p:spTree>
+      <p:nvGrpSpPr>
+        <p:cNvPr id="1" name=""/>
+        <p:cNvGrpSpPr/>
+        <p:nvPr/>
+      </p:nvGrpSpPr>
+      <p:grpSpPr/>
+      <p:sp>
+        <p:nvSpPr>
+          <p:cNvPr id="2" name="TextBox 1"/>
+          <p:cNvSpPr txBox="1"/>
+          <p:nvPr/>
+        </p:nvSpPr>
+        <p:spPr>
+          <a:xfrm>
+            <a:off x="457200" y="320040"/>
+            <a:ext cx="8229600" cy="822960"/>
+          </a:xfrm>
+          <a:prstGeom prst="rect">
+            <a:avLst/>
+          </a:prstGeom>
+          <a:noFill/>
+        </p:spPr>
+        <p:txBody>
+          <a:bodyPr wrap="square">
+            <a:spAutoFit/>
+          </a:bodyPr>
+          <a:lstStyle/>
+          <a:p>
+            <a:r>
+              <a:rPr sz="2600" b="1">
+                <a:solidFill>
+                  <a:srgbClr val="0B3D2E"/>
+                </a:solidFill>
+              </a:rPr>
+              <a:t>🔗 Referencias verificables y alcance</a:t>
+            </a:r>
+          </a:p>
+        </p:txBody>
+      </p:sp>
+      <p:sp>
+        <p:nvSpPr>
+          <p:cNvPr id="3" name="TextBox 2"/>
+          <p:cNvSpPr txBox="1"/>
+          <p:nvPr/>
+        </p:nvSpPr>
+        <p:spPr>
+          <a:xfrm>
+            <a:off x="457200" y="1280160"/>
+            <a:ext cx="8229600" cy="4937760"/>
+          </a:xfrm>
+          <a:prstGeom prst="rect">
+            <a:avLst/>
+          </a:prstGeom>
+          <a:noFill/>
+        </p:spPr>
+        <p:txBody>
+          <a:bodyPr wrap="square">
+            <a:spAutoFit/>
+          </a:bodyPr>
+          <a:lstStyle/>
+          <a:p>
+            <a:pPr>
+              <a:spcAft>
+                <a:spcPts val="600"/>
+              </a:spcAft>
+            </a:pPr>
+            <a:r>
+              <a:rPr sz="1500">
+                <a:solidFill>
+                  <a:srgbClr val="22282E"/>
+                </a:solidFill>
+              </a:rPr>
+              <a:t>•  MITRE ATT&amp;CK: fuente primaria para mapear procedimientos demostrados por evidencia; el mapeo no reemplaza la reconstrucción temporal — &lt;https://attack.mitre.org/&gt;</a:t>
+            </a:r>
+          </a:p>
+          <a:p>
+            <a:pPr>
+              <a:spcAft>
+                <a:spcPts val="600"/>
+              </a:spcAft>
+            </a:pPr>
+            <a:r>
+              <a:rPr sz="1500">
+                <a:solidFill>
+                  <a:srgbClr val="22282E"/>
+                </a:solidFill>
+              </a:rPr>
+              <a:t>•  Splunk BOTS v3: dataset público mantenido por Splunk para investigaciones reproducibles; los hechos del caso se derivan del dataset, no se generalizan como frecuencia real —…</a:t>
+            </a:r>
+          </a:p>
+          <a:p>
+            <a:pPr>
+              <a:spcAft>
+                <a:spcPts val="600"/>
+              </a:spcAft>
+            </a:pPr>
+            <a:r>
+              <a:rPr sz="1500">
+                <a:solidFill>
+                  <a:srgbClr val="22282E"/>
+                </a:solidFill>
+              </a:rPr>
+              <a:t>•  EVTX-ATTACK-SAMPLES: colección comunitaria de eventos Windows para laboratorio; cada muestra debe identificarse y conservarse con su procedencia — &lt;https://github.com/sbousseaden/EVTX-ATTACK-SAMPLES&gt;</a:t>
+            </a:r>
+          </a:p>
+          <a:p>
+            <a:pPr>
+              <a:spcAft>
+                <a:spcPts val="600"/>
+              </a:spcAft>
+            </a:pPr>
+            <a:r>
+              <a:rPr sz="1500">
+                <a:solidFill>
+                  <a:srgbClr val="22282E"/>
+                </a:solidFill>
+              </a:rPr>
+              <a:t>•  Bejtlich, R. The Practice of Network Security Monitoring. No Starch Press: bibliografía complementaria sobre razonamiento investigativo.</a:t>
+            </a:r>
+          </a:p>
+          <a:p>
+            <a:pPr>
+              <a:spcAft>
+                <a:spcPts val="600"/>
+              </a:spcAft>
+            </a:pPr>
+            <a:r>
+              <a:rPr sz="1500">
+                <a:solidFill>
+                  <a:srgbClr val="22282E"/>
+                </a:solidFill>
+              </a:rPr>
+              <a:t>•  Sanders, C. y Smith, J. Applied Network Security Monitoring. Syngress: bibliografía complementaria sobre análisis de evidencia de red.</a:t>
+            </a:r>
+          </a:p>
+        </p:txBody>
+      </p:sp>
+    </p:spTree>
+  </p:cSld>
+  <p:clrMapOvr>
+    <a:masterClrMapping/>
+  </p:clrMapOvr>
+</p:sld>
+</file>
+
+<file path=ppt/slides/slide17.xml><?xml version="1.0" encoding="utf-8"?>
+<p:sld xmlns:a="http://schemas.openxmlformats.org/drawingml/2006/main" xmlns:p="http://schemas.openxmlformats.org/presentationml/2006/main" xmlns:r="http://schemas.openxmlformats.org/officeDocument/2006/relationships">
+  <p:cSld>
+    <p:spTree>
+      <p:nvGrpSpPr>
+        <p:cNvPr id="1" name=""/>
+        <p:cNvGrpSpPr/>
+        <p:nvPr/>
+      </p:nvGrpSpPr>
+      <p:grpSpPr/>
+      <p:sp>
+        <p:nvSpPr>
+          <p:cNvPr id="2" name="TextBox 1"/>
+          <p:cNvSpPr txBox="1"/>
+          <p:nvPr/>
+        </p:nvSpPr>
+        <p:spPr>
+          <a:xfrm>
+            <a:off x="457200" y="274320"/>
+            <a:ext cx="8229600" cy="640080"/>
+          </a:xfrm>
+          <a:prstGeom prst="rect">
+            <a:avLst/>
+          </a:prstGeom>
+          <a:noFill/>
+        </p:spPr>
+        <p:txBody>
+          <a:bodyPr wrap="square">
+            <a:spAutoFit/>
+          </a:bodyPr>
+          <a:lstStyle/>
+          <a:p>
+            <a:r>
+              <a:rPr sz="2200" b="1">
+                <a:solidFill>
+                  <a:srgbClr val="0B3D2E"/>
+                </a:solidFill>
+              </a:rPr>
+              <a:t>Diagrama de la clase</a:t>
+            </a:r>
+          </a:p>
+        </p:txBody>
+      </p:sp>
+      <p:pic>
+        <p:nvPicPr>
+          <p:cNvPr id="3" name="Picture 2" descr="b7177cbeee05ff97.png"/>
+          <p:cNvPicPr>
+            <a:picLocks noChangeAspect="1"/>
+          </p:cNvPicPr>
+          <p:nvPr/>
+        </p:nvPicPr>
+        <p:blipFill>
+          <a:blip r:embed="rId2"/>
+          <a:stretch>
+            <a:fillRect/>
+          </a:stretch>
+        </p:blipFill>
+        <p:spPr>
+          <a:xfrm>
+            <a:off x="457200" y="3300984"/>
+            <a:ext cx="8229600" cy="896112"/>
+          </a:xfrm>
+          <a:prstGeom prst="rect">
+            <a:avLst/>
+          </a:prstGeom>
+        </p:spPr>
+      </p:pic>
     </p:spTree>
   </p:cSld>
   <p:clrMapOvr>
@@ -3698,7 +4359,7 @@
                   <a:srgbClr val="22282E"/>
                 </a:solidFill>
               </a:rPr>
-              <a:t>•  Integrar todo lo aprendido en la parte resolviendo casos realistas de detección de principio a fin: desde el compromiso inicial hasta la exfiltración, reconstruyendo la cadena de ataque con telemetría de endpoint y red, mapeándola a ATT&amp;CK y proponiendo las detecciones que la habrían atrapado antes. Es la clase de síntesis práctica del blue team.</a:t>
+              <a:t>•  Integrar todo lo aprendido en la parte resolviendo casos realistas de detección de principio a fin: desde el compromiso inicial hasta la exfiltración, reconstruyendo la cadena de ataque con…</a:t>
             </a:r>
           </a:p>
         </p:txBody>
@@ -4092,7 +4753,7 @@
                   <a:srgbClr val="0B3D2E"/>
                 </a:solidFill>
               </a:rPr>
-              <a:t>📖 Definiciones y características</a:t>
+              <a:t>🧠 Explicación en profundidad</a:t>
             </a:r>
           </a:p>
         </p:txBody>
@@ -4130,82 +4791,97 @@
                   <a:srgbClr val="22282E"/>
                 </a:solidFill>
               </a:rPr>
-              <a:t>•  Análisis de caso: estudio estructurado de una intrusión para extraer detecciones y lecciones. Característica: enfoque retrospectivo con valor prospectivo.</a:t>
-            </a:r>
-          </a:p>
-          <a:p>
-            <a:pPr>
-              <a:spcAft>
-                <a:spcPts val="600"/>
-              </a:spcAft>
-            </a:pPr>
-            <a:r>
-              <a:rPr sz="1500">
-                <a:solidFill>
-                  <a:srgbClr val="22282E"/>
-                </a:solidFill>
-              </a:rPr>
-              <a:t>•  Línea de tiempo (timeline): secuencia ordenada de eventos del incidente. Característica: base de toda reconstrucción; requiere tiempo sincronizado (clase 182).</a:t>
-            </a:r>
-          </a:p>
-          <a:p>
-            <a:pPr>
-              <a:spcAft>
-                <a:spcPts val="600"/>
-              </a:spcAft>
-            </a:pPr>
-            <a:r>
-              <a:rPr sz="1500">
-                <a:solidFill>
-                  <a:srgbClr val="22282E"/>
-                </a:solidFill>
-              </a:rPr>
-              <a:t>•  Cadena de ataque: fases del compromiso (acceso inicial → ejecución → persistencia → lateral → C2 → exfiltración). Característica: cada eslabón es una oportunidad de detección.</a:t>
-            </a:r>
-          </a:p>
-          <a:p>
-            <a:pPr>
-              <a:spcAft>
-                <a:spcPts val="600"/>
-              </a:spcAft>
-            </a:pPr>
-            <a:r>
-              <a:rPr sz="1500">
-                <a:solidFill>
-                  <a:srgbClr val="22282E"/>
-                </a:solidFill>
-              </a:rPr>
-              <a:t>•  Punto de detección: momento donde una regla habría disparado. Característica: cuanto más temprano, menor el daño.</a:t>
-            </a:r>
-          </a:p>
-          <a:p>
-            <a:pPr>
-              <a:spcAft>
-                <a:spcPts val="600"/>
-              </a:spcAft>
-            </a:pPr>
-            <a:r>
-              <a:rPr sz="1500">
-                <a:solidFill>
-                  <a:srgbClr val="22282E"/>
-                </a:solidFill>
-              </a:rPr>
-              <a:t>•  Pivot: paso de un dato a otro relacionado (proceso→conexión→host). Característica: técnica central de la investigación.</a:t>
-            </a:r>
-          </a:p>
-          <a:p>
-            <a:pPr>
-              <a:spcAft>
-                <a:spcPts val="600"/>
-              </a:spcAft>
-            </a:pPr>
-            <a:r>
-              <a:rPr sz="1500">
-                <a:solidFill>
-                  <a:srgbClr val="22282E"/>
-                </a:solidFill>
-              </a:rPr>
-              <a:t>•  Lección aprendida: mejora concreta derivada del caso. Característica: debe traducirse en detección, control o proceso.</a:t>
+              <a:t>•  Un caso defensivo reconstruye decisiones desde evidencia, no una narración retrospectiva perfecta. Cada elemento se marca como hecho observado, inferencia sustentada o hipótesis pendiente. Fuente…</a:t>
+            </a:r>
+          </a:p>
+          <a:p>
+            <a:pPr>
+              <a:spcAft>
+                <a:spcPts val="600"/>
+              </a:spcAft>
+            </a:pPr>
+            <a:r>
+              <a:rPr sz="1500">
+                <a:solidFill>
+                  <a:srgbClr val="22282E"/>
+                </a:solidFill>
+              </a:rPr>
+              <a:t>•  Se distinguen hora del evento, registro e ingesta para ordenar eventos tardíos. Una detección ausente se clasifica: fuente no recolectada, parser defectuoso, analítica inexistente, alerta no creada o…</a:t>
+            </a:r>
+          </a:p>
+          <a:p>
+            <a:pPr>
+              <a:spcAft>
+                <a:spcPts val="600"/>
+              </a:spcAft>
+            </a:pPr>
+            <a:r>
+              <a:rPr sz="1500">
+                <a:solidFill>
+                  <a:srgbClr val="22282E"/>
+                </a:solidFill>
+              </a:rPr>
+              <a:t>•  Un caso empieza con preguntas: qué entidad actuó, qué activo fue afectado, qué cambió y qué evidencia falta. La línea de tiempo reúne eventos con procedencia; el grafo conecta usuarios, procesos…</a:t>
+            </a:r>
+          </a:p>
+          <a:p>
+            <a:pPr>
+              <a:spcAft>
+                <a:spcPts val="600"/>
+              </a:spcAft>
+            </a:pPr>
+            <a:r>
+              <a:rPr sz="1500">
+                <a:solidFill>
+                  <a:srgbClr val="22282E"/>
+                </a:solidFill>
+              </a:rPr>
+              <a:t>•  Esta separación evita retrospectiva perfecta. Sabiendo el resultado, es fácil interpretar toda anomalía como señal evidente. El analista debe registrar qué podía conocerse en ese momento y qué…</a:t>
+            </a:r>
+          </a:p>
+          <a:p>
+            <a:pPr>
+              <a:spcAft>
+                <a:spcPts val="600"/>
+              </a:spcAft>
+            </a:pPr>
+            <a:r>
+              <a:rPr sz="1500">
+                <a:solidFill>
+                  <a:srgbClr val="22282E"/>
+                </a:solidFill>
+              </a:rPr>
+              <a:t>•  Splunk Boss of the SOC ofrece datasets y preguntas de investigación para practicar; EVTX-ATTACK-SAMPLES reúne eventos útiles para probar artefactos. Son materiales de laboratorio, no prueba de…</a:t>
+            </a:r>
+          </a:p>
+          <a:p>
+            <a:pPr>
+              <a:spcAft>
+                <a:spcPts val="600"/>
+              </a:spcAft>
+            </a:pPr>
+            <a:r>
+              <a:rPr sz="1500">
+                <a:solidFill>
+                  <a:srgbClr val="22282E"/>
+                </a:solidFill>
+              </a:rPr>
+              <a:t>•  ATT&amp;CK se aplica después de entender el comportamiento. Mapear una ejecución a una técnica no añade evidencia; ofrece vocabulario para comunicar. El caso debe explicar qué procedimiento y campos…</a:t>
+            </a:r>
+          </a:p>
+          <a:p>
+            <a:pPr>
+              <a:spcAft>
+                <a:spcPts val="600"/>
+              </a:spcAft>
+            </a:pPr>
+            <a:r>
+              <a:rPr sz="1500">
+                <a:solidFill>
+                  <a:srgbClr val="22282E"/>
+                </a:solidFill>
+              </a:rPr>
+              <a:t>•  Una alerta perdida se localiza en la cadena. Si el origen nunca generó dato, se corrige instrumentación; si llegó sin campos, parser; si la consulta no coincidió, lógica; si coincidió pero no creó…</a:t>
             </a:r>
           </a:p>
         </p:txBody>
@@ -4256,7 +4932,7 @@
                   <a:srgbClr val="0B3D2E"/>
                 </a:solidFill>
               </a:rPr>
-              <a:t>🧰 Herramientas y preparación</a:t>
+              <a:t>📔 Glosario</a:t>
             </a:r>
           </a:p>
         </p:txBody>
@@ -4294,67 +4970,97 @@
                   <a:srgbClr val="22282E"/>
                 </a:solidFill>
               </a:rPr>
-              <a:t>•  Un dataset de intrusión realista: Splunk BOTS, Security Onion con PCAP/logs de ejemplo, o EVTX-ATTACK-SAMPLES (colección de Event Logs de ataques).</a:t>
-            </a:r>
-          </a:p>
-          <a:p>
-            <a:pPr>
-              <a:spcAft>
-                <a:spcPts val="600"/>
-              </a:spcAft>
-            </a:pPr>
-            <a:r>
-              <a:rPr sz="1500">
-                <a:solidFill>
-                  <a:srgbClr val="22282E"/>
-                </a:solidFill>
-              </a:rPr>
-              <a:t>•  Tu SIEM (Splunk/Elastic) para consultar la telemetría del caso.</a:t>
-            </a:r>
-          </a:p>
-          <a:p>
-            <a:pPr>
-              <a:spcAft>
-                <a:spcPts val="600"/>
-              </a:spcAft>
-            </a:pPr>
-            <a:r>
-              <a:rPr sz="1500">
-                <a:solidFill>
-                  <a:srgbClr val="22282E"/>
-                </a:solidFill>
-              </a:rPr>
-              <a:t>•  ATT&amp;CK Navigator para el mapeo.</a:t>
-            </a:r>
-          </a:p>
-          <a:p>
-            <a:pPr>
-              <a:spcAft>
-                <a:spcPts val="600"/>
-              </a:spcAft>
-            </a:pPr>
-            <a:r>
-              <a:rPr sz="1500">
-                <a:solidFill>
-                  <a:srgbClr val="22282E"/>
-                </a:solidFill>
-              </a:rPr>
-              <a:t>•  Una plantilla de reporte de incidente con línea de tiempo.</a:t>
-            </a:r>
-          </a:p>
-          <a:p>
-            <a:pPr>
-              <a:spcAft>
-                <a:spcPts val="600"/>
-              </a:spcAft>
-            </a:pPr>
-            <a:r>
-              <a:rPr sz="1500">
-                <a:solidFill>
-                  <a:srgbClr val="22282E"/>
-                </a:solidFill>
-              </a:rPr>
-              <a:t>•  Trabaja sobre datasets públicos o de tu laboratorio; no analices datos de terceros sin autorización.</a:t>
+              <a:t>•  Hecho: observación directamente respaldada.</a:t>
+            </a:r>
+          </a:p>
+          <a:p>
+            <a:pPr>
+              <a:spcAft>
+                <a:spcPts val="600"/>
+              </a:spcAft>
+            </a:pPr>
+            <a:r>
+              <a:rPr sz="1500">
+                <a:solidFill>
+                  <a:srgbClr val="22282E"/>
+                </a:solidFill>
+              </a:rPr>
+              <a:t>•  Inferencia: conclusión razonada desde hechos.</a:t>
+            </a:r>
+          </a:p>
+          <a:p>
+            <a:pPr>
+              <a:spcAft>
+                <a:spcPts val="600"/>
+              </a:spcAft>
+            </a:pPr>
+            <a:r>
+              <a:rPr sz="1500">
+                <a:solidFill>
+                  <a:srgbClr val="22282E"/>
+                </a:solidFill>
+              </a:rPr>
+              <a:t>•  Hipótesis: explicación por contrastar.</a:t>
+            </a:r>
+          </a:p>
+          <a:p>
+            <a:pPr>
+              <a:spcAft>
+                <a:spcPts val="600"/>
+              </a:spcAft>
+            </a:pPr>
+            <a:r>
+              <a:rPr sz="1500">
+                <a:solidFill>
+                  <a:srgbClr val="22282E"/>
+                </a:solidFill>
+              </a:rPr>
+              <a:t>•  Timeline: secuencia normalizada de eventos.</a:t>
+            </a:r>
+          </a:p>
+          <a:p>
+            <a:pPr>
+              <a:spcAft>
+                <a:spcPts val="600"/>
+              </a:spcAft>
+            </a:pPr>
+            <a:r>
+              <a:rPr sz="1500">
+                <a:solidFill>
+                  <a:srgbClr val="22282E"/>
+                </a:solidFill>
+              </a:rPr>
+              <a:t>•  Provenance: origen y tratamiento de evidencia.</a:t>
+            </a:r>
+          </a:p>
+          <a:p>
+            <a:pPr>
+              <a:spcAft>
+                <a:spcPts val="600"/>
+              </a:spcAft>
+            </a:pPr>
+            <a:r>
+              <a:rPr sz="1500">
+                <a:solidFill>
+                  <a:srgbClr val="22282E"/>
+                </a:solidFill>
+              </a:rPr>
+              <a:t>•  Regresión: prueba que evita reintroducir un fallo.</a:t>
+            </a:r>
+          </a:p>
+          <a:p>
+            <a:pPr>
+              <a:spcAft>
+                <a:spcPts val="600"/>
+              </a:spcAft>
+            </a:pPr>
+            <a:r>
+              <a:rPr sz="1500">
+                <a:solidFill>
+                  <a:srgbClr val="22282E"/>
+                </a:solidFill>
+              </a:rPr>
+              <a:t>•  Blind spot: comportamiento sin visibilidad suficiente.</a:t>
             </a:r>
           </a:p>
         </p:txBody>
@@ -4405,7 +5111,7 @@
                   <a:srgbClr val="0B3D2E"/>
                 </a:solidFill>
               </a:rPr>
-              <a:t>🧪 Laboratorio guiado — Resuelve una intrusión completa</a:t>
+              <a:t>📖 Definiciones y características</a:t>
             </a:r>
           </a:p>
         </p:txBody>
@@ -4443,97 +5149,82 @@
                   <a:srgbClr val="22282E"/>
                 </a:solidFill>
               </a:rPr>
-              <a:t>•  Carga el dataset. Importa BOTS o los EVTX de ataque en tu SIEM.</a:t>
-            </a:r>
-          </a:p>
-          <a:p>
-            <a:pPr>
-              <a:spcAft>
-                <a:spcPts val="600"/>
-              </a:spcAft>
-            </a:pPr>
-            <a:r>
-              <a:rPr sz="1500">
-                <a:solidFill>
-                  <a:srgbClr val="22282E"/>
-                </a:solidFill>
-              </a:rPr>
-              <a:t>•  Establece el punto de partida. Localiza el acceso inicial (correo de phishing, adjunto, primer proceso anómalo) y fija el T0.</a:t>
-            </a:r>
-          </a:p>
-          <a:p>
-            <a:pPr>
-              <a:spcAft>
-                <a:spcPts val="600"/>
-              </a:spcAft>
-            </a:pPr>
-            <a:r>
-              <a:rPr sz="1500">
-                <a:solidFill>
-                  <a:srgbClr val="22282E"/>
-                </a:solidFill>
-              </a:rPr>
-              <a:t>•  Sigue la ejecución. Pivota del adjunto al proceso (Sysmon 1), a la línea de comandos y a la descarga (Event 3/proxy).</a:t>
-            </a:r>
-          </a:p>
-          <a:p>
-            <a:pPr>
-              <a:spcAft>
-                <a:spcPts val="600"/>
-              </a:spcAft>
-            </a:pPr>
-            <a:r>
-              <a:rPr sz="1500">
-                <a:solidFill>
-                  <a:srgbClr val="22282E"/>
-                </a:solidFill>
-              </a:rPr>
-              <a:t>•  Detecta persistencia. Busca tareas programadas, Run keys o servicios creados (4698, Sysmon 13, 7045).</a:t>
-            </a:r>
-          </a:p>
-          <a:p>
-            <a:pPr>
-              <a:spcAft>
-                <a:spcPts val="600"/>
-              </a:spcAft>
-            </a:pPr>
-            <a:r>
-              <a:rPr sz="1500">
-                <a:solidFill>
-                  <a:srgbClr val="22282E"/>
-                </a:solidFill>
-              </a:rPr>
-              <a:t>•  Rastrea el movimiento lateral. Correlaciona logons entre hosts (clase 192): PsExec/WMI/WinRM, 4624 tipo 3/10.</a:t>
-            </a:r>
-          </a:p>
-          <a:p>
-            <a:pPr>
-              <a:spcAft>
-                <a:spcPts val="600"/>
-              </a:spcAft>
-            </a:pPr>
-            <a:r>
-              <a:rPr sz="1500">
-                <a:solidFill>
-                  <a:srgbClr val="22282E"/>
-                </a:solidFill>
-              </a:rPr>
-              <a:t>•  Encuentra el C2 y la exfiltración. Identifica beaconing (clase 193) y salida de datos anómala (clase 191).</a:t>
-            </a:r>
-          </a:p>
-          <a:p>
-            <a:pPr>
-              <a:spcAft>
-                <a:spcPts val="600"/>
-              </a:spcAft>
-            </a:pPr>
-            <a:r>
-              <a:rPr sz="1500">
-                <a:solidFill>
-                  <a:srgbClr val="22282E"/>
-                </a:solidFill>
-              </a:rPr>
-              <a:t>•  Construye la timeline. Ordena todos los eventos con su técnica ATT&amp;CK asociada en una tabla.</a:t>
+              <a:t>•  Análisis de caso: estudio estructurado de una intrusión para extraer detecciones y lecciones. Característica: enfoque retrospectivo con valor prospectivo.</a:t>
+            </a:r>
+          </a:p>
+          <a:p>
+            <a:pPr>
+              <a:spcAft>
+                <a:spcPts val="600"/>
+              </a:spcAft>
+            </a:pPr>
+            <a:r>
+              <a:rPr sz="1500">
+                <a:solidFill>
+                  <a:srgbClr val="22282E"/>
+                </a:solidFill>
+              </a:rPr>
+              <a:t>•  Línea de tiempo (timeline): secuencia ordenada de eventos del incidente. Característica: base de toda reconstrucción; requiere tiempo sincronizado (clase 182).</a:t>
+            </a:r>
+          </a:p>
+          <a:p>
+            <a:pPr>
+              <a:spcAft>
+                <a:spcPts val="600"/>
+              </a:spcAft>
+            </a:pPr>
+            <a:r>
+              <a:rPr sz="1500">
+                <a:solidFill>
+                  <a:srgbClr val="22282E"/>
+                </a:solidFill>
+              </a:rPr>
+              <a:t>•  Cadena de ataque: fases del compromiso (acceso inicial → ejecución → persistencia → lateral → C2 → exfiltración). Característica: cada eslabón es una oportunidad de detección.</a:t>
+            </a:r>
+          </a:p>
+          <a:p>
+            <a:pPr>
+              <a:spcAft>
+                <a:spcPts val="600"/>
+              </a:spcAft>
+            </a:pPr>
+            <a:r>
+              <a:rPr sz="1500">
+                <a:solidFill>
+                  <a:srgbClr val="22282E"/>
+                </a:solidFill>
+              </a:rPr>
+              <a:t>•  Punto de detección: momento donde una regla habría disparado. Característica: cuanto más temprano, menor el daño.</a:t>
+            </a:r>
+          </a:p>
+          <a:p>
+            <a:pPr>
+              <a:spcAft>
+                <a:spcPts val="600"/>
+              </a:spcAft>
+            </a:pPr>
+            <a:r>
+              <a:rPr sz="1500">
+                <a:solidFill>
+                  <a:srgbClr val="22282E"/>
+                </a:solidFill>
+              </a:rPr>
+              <a:t>•  Pivot: paso de un dato a otro relacionado (proceso→conexión→host). Característica: técnica central de la investigación.</a:t>
+            </a:r>
+          </a:p>
+          <a:p>
+            <a:pPr>
+              <a:spcAft>
+                <a:spcPts val="600"/>
+              </a:spcAft>
+            </a:pPr>
+            <a:r>
+              <a:rPr sz="1500">
+                <a:solidFill>
+                  <a:srgbClr val="22282E"/>
+                </a:solidFill>
+              </a:rPr>
+              <a:t>•  Lección aprendida: mejora concreta derivada del caso. Característica: debe traducirse en detección, control o proceso.</a:t>
             </a:r>
           </a:p>
         </p:txBody>
@@ -4584,7 +5275,7 @@
                   <a:srgbClr val="0B3D2E"/>
                 </a:solidFill>
               </a:rPr>
-              <a:t>✍️ Ejercicios</a:t>
+              <a:t>🔍 Caso resuelto — detección ausente</a:t>
             </a:r>
           </a:p>
         </p:txBody>
@@ -4622,82 +5313,37 @@
                   <a:srgbClr val="22282E"/>
                 </a:solidFill>
               </a:rPr>
-              <a:t>•  Reconstruye la fase de acceso inicial de un caso con sus eventos.</a:t>
-            </a:r>
-          </a:p>
-          <a:p>
-            <a:pPr>
-              <a:spcAft>
-                <a:spcPts val="600"/>
-              </a:spcAft>
-            </a:pPr>
-            <a:r>
-              <a:rPr sz="1500">
-                <a:solidFill>
-                  <a:srgbClr val="22282E"/>
-                </a:solidFill>
-              </a:rPr>
-              <a:t>•  Mapea las 6 fases de un caso a técnicas ATT&amp;CK concretas.</a:t>
-            </a:r>
-          </a:p>
-          <a:p>
-            <a:pPr>
-              <a:spcAft>
-                <a:spcPts val="600"/>
-              </a:spcAft>
-            </a:pPr>
-            <a:r>
-              <a:rPr sz="1500">
-                <a:solidFill>
-                  <a:srgbClr val="22282E"/>
-                </a:solidFill>
-              </a:rPr>
-              <a:t>•  Identifica el punto de detección más temprano posible y su regla.</a:t>
-            </a:r>
-          </a:p>
-          <a:p>
-            <a:pPr>
-              <a:spcAft>
-                <a:spcPts val="600"/>
-              </a:spcAft>
-            </a:pPr>
-            <a:r>
-              <a:rPr sz="1500">
-                <a:solidFill>
-                  <a:srgbClr val="22282E"/>
-                </a:solidFill>
-              </a:rPr>
-              <a:t>•  Redacta 5 lecciones aprendidas accionables.</a:t>
-            </a:r>
-          </a:p>
-          <a:p>
-            <a:pPr>
-              <a:spcAft>
-                <a:spcPts val="600"/>
-              </a:spcAft>
-            </a:pPr>
-            <a:r>
-              <a:rPr sz="1500">
-                <a:solidFill>
-                  <a:srgbClr val="22282E"/>
-                </a:solidFill>
-              </a:rPr>
-              <a:t>•  Escribe una detección nueva derivada de un hueco del caso.</a:t>
-            </a:r>
-          </a:p>
-          <a:p>
-            <a:pPr>
-              <a:spcAft>
-                <a:spcPts val="600"/>
-              </a:spcAft>
-            </a:pPr>
-            <a:r>
-              <a:rPr sz="1500">
-                <a:solidFill>
-                  <a:srgbClr val="22282E"/>
-                </a:solidFill>
-              </a:rPr>
-              <a:t>•  Elabora la línea de tiempo del caso en una sola tabla.</a:t>
+              <a:t>•  Un dataset controlado contiene documento, intérprete y conexión. La timeline confirma los tres hechos. En el SIEM existen proceso y red, pero la regla no alertó. Se ejecuta la consulta contra el…</a:t>
+            </a:r>
+          </a:p>
+          <a:p>
+            <a:pPr>
+              <a:spcAft>
+                <a:spcPts val="600"/>
+              </a:spcAft>
+            </a:pPr>
+            <a:r>
+              <a:rPr sz="1500">
+                <a:solidFill>
+                  <a:srgbClr val="22282E"/>
+                </a:solidFill>
+              </a:rPr>
+              <a:t>•  La clasificación es «mapeo/parser», no «regla inexistente». Se corrige el pipeline o contrato, se reindexa la muestra cuando procede y se ejecutan fixtures. Después se verifica notable y triaje. El…</a:t>
+            </a:r>
+          </a:p>
+          <a:p>
+            <a:pPr>
+              <a:spcAft>
+                <a:spcPts val="600"/>
+              </a:spcAft>
+            </a:pPr>
+            <a:r>
+              <a:rPr sz="1500">
+                <a:solidFill>
+                  <a:srgbClr val="22282E"/>
+                </a:solidFill>
+              </a:rPr>
+              <a:t>•  El informe conserva dataset/commit, hash, versión de parser, consulta antes/después, positivo, negativo y resultado. También registra que la prueba cubre una variante concreta y no todas las…</a:t>
             </a:r>
           </a:p>
         </p:txBody>
@@ -4748,7 +5394,7 @@
                   <a:srgbClr val="0B3D2E"/>
                 </a:solidFill>
               </a:rPr>
-              <a:t>📝 Reto verificable</a:t>
+              <a:t>✅ Criterio de dominio</a:t>
             </a:r>
           </a:p>
         </p:txBody>
@@ -4786,7 +5432,7 @@
                   <a:srgbClr val="22282E"/>
                 </a:solidFill>
               </a:rPr>
-              <a:t>•  Resuelve un caso completo entregando: línea de tiempo con técnicas ATT&amp;CK por fase, identificación de los puntos de detección perdidos y al menos tres detecciones nuevas que habrían interrumpido la cadena antes. Criterio de aceptación: la timeline cubre desde el acceso inicial hasta la exfiltración de forma coherente y con tiempos ordenados, cada fase está mapeada a su técnica correcta, y las detecciones propuestas son verificables (probadas o expresadas como reglas Sigma/SIEM concretas).</a:t>
+              <a:t>•  El alumno separa hechos, inferencias e hipótesis; reproduce el gap; lo localiza en una etapa y demuestra regresión. Una narración sin consultas ni procedencia no es caso de estudio verificable.</a:t>
             </a:r>
           </a:p>
         </p:txBody>
